--- a/exe1-atom/exe1-note.pptx
+++ b/exe1-atom/exe1-note.pptx
@@ -234,7 +234,7 @@
           <a:p>
             <a:fld id="{3EB80689-640A-6B4C-90FA-ADFF5B7514F1}" type="datetimeFigureOut">
               <a:rPr lang="en-US" smtClean="0"/>
-              <a:t>7/8/2026</a:t>
+              <a:t>7/13/2026</a:t>
             </a:fld>
             <a:endParaRPr lang="en-US"/>
           </a:p>
@@ -399,7 +399,7 @@
           <a:p>
             <a:fld id="{0B11EF9B-4BEA-4144-A8EF-0C527B936D92}" type="datetimeFigureOut">
               <a:rPr lang="en-US" smtClean="0"/>
-              <a:t>7/8/2026</a:t>
+              <a:t>7/13/2026</a:t>
             </a:fld>
             <a:endParaRPr lang="en-US"/>
           </a:p>
@@ -4574,7 +4574,7 @@
           <a:p>
             <a:fld id="{FDA23AFB-D695-45DC-B078-1AF933B2D3AC}" type="datetimeFigureOut">
               <a:rPr lang="ko-KR" altLang="en-US" smtClean="0"/>
-              <a:t>2026-07-08</a:t>
+              <a:t>2026-07-13</a:t>
             </a:fld>
             <a:endParaRPr lang="ko-KR" altLang="en-US"/>
           </a:p>
@@ -4812,7 +4812,7 @@
           <a:p>
             <a:fld id="{FDA23AFB-D695-45DC-B078-1AF933B2D3AC}" type="datetimeFigureOut">
               <a:rPr lang="ko-KR" altLang="en-US" smtClean="0"/>
-              <a:t>2026-07-08</a:t>
+              <a:t>2026-07-13</a:t>
             </a:fld>
             <a:endParaRPr lang="ko-KR" altLang="en-US"/>
           </a:p>
@@ -5117,7 +5117,7 @@
           <a:p>
             <a:fld id="{FDA23AFB-D695-45DC-B078-1AF933B2D3AC}" type="datetimeFigureOut">
               <a:rPr lang="ko-KR" altLang="en-US" smtClean="0"/>
-              <a:t>2026-07-08</a:t>
+              <a:t>2026-07-13</a:t>
             </a:fld>
             <a:endParaRPr lang="ko-KR" altLang="en-US"/>
           </a:p>
@@ -5420,7 +5420,7 @@
           <a:p>
             <a:fld id="{FDA23AFB-D695-45DC-B078-1AF933B2D3AC}" type="datetimeFigureOut">
               <a:rPr lang="ko-KR" altLang="en-US" smtClean="0"/>
-              <a:t>2026-07-08</a:t>
+              <a:t>2026-07-13</a:t>
             </a:fld>
             <a:endParaRPr lang="ko-KR" altLang="en-US"/>
           </a:p>
@@ -5871,7 +5871,7 @@
           <a:p>
             <a:fld id="{FDA23AFB-D695-45DC-B078-1AF933B2D3AC}" type="datetimeFigureOut">
               <a:rPr lang="ko-KR" altLang="en-US" smtClean="0"/>
-              <a:t>2026-07-08</a:t>
+              <a:t>2026-07-13</a:t>
             </a:fld>
             <a:endParaRPr lang="ko-KR" altLang="en-US"/>
           </a:p>
@@ -6044,7 +6044,7 @@
           <a:p>
             <a:fld id="{FDA23AFB-D695-45DC-B078-1AF933B2D3AC}" type="datetimeFigureOut">
               <a:rPr lang="ko-KR" altLang="en-US" smtClean="0"/>
-              <a:t>2026-07-08</a:t>
+              <a:t>2026-07-13</a:t>
             </a:fld>
             <a:endParaRPr lang="ko-KR" altLang="en-US"/>
           </a:p>
@@ -6181,7 +6181,7 @@
           <a:p>
             <a:fld id="{FDA23AFB-D695-45DC-B078-1AF933B2D3AC}" type="datetimeFigureOut">
               <a:rPr lang="ko-KR" altLang="en-US" smtClean="0"/>
-              <a:t>2026-07-08</a:t>
+              <a:t>2026-07-13</a:t>
             </a:fld>
             <a:endParaRPr lang="ko-KR" altLang="en-US"/>
           </a:p>
@@ -6525,7 +6525,7 @@
           <a:p>
             <a:fld id="{FDA23AFB-D695-45DC-B078-1AF933B2D3AC}" type="datetimeFigureOut">
               <a:rPr lang="ko-KR" altLang="en-US" smtClean="0"/>
-              <a:t>2026-07-08</a:t>
+              <a:t>2026-07-13</a:t>
             </a:fld>
             <a:endParaRPr lang="ko-KR" altLang="en-US"/>
           </a:p>
@@ -7064,7 +7064,7 @@
           <a:p>
             <a:fld id="{FDA23AFB-D695-45DC-B078-1AF933B2D3AC}" type="datetimeFigureOut">
               <a:rPr lang="ko-KR" altLang="en-US" smtClean="0"/>
-              <a:t>2026-07-08</a:t>
+              <a:t>2026-07-13</a:t>
             </a:fld>
             <a:endParaRPr lang="ko-KR" altLang="en-US"/>
           </a:p>
@@ -7302,7 +7302,7 @@
           <a:p>
             <a:fld id="{FDA23AFB-D695-45DC-B078-1AF933B2D3AC}" type="datetimeFigureOut">
               <a:rPr lang="ko-KR" altLang="en-US" smtClean="0"/>
-              <a:t>2026-07-08</a:t>
+              <a:t>2026-07-13</a:t>
             </a:fld>
             <a:endParaRPr lang="ko-KR" altLang="en-US"/>
           </a:p>
@@ -7540,7 +7540,7 @@
           <a:p>
             <a:fld id="{FDA23AFB-D695-45DC-B078-1AF933B2D3AC}" type="datetimeFigureOut">
               <a:rPr lang="ko-KR" altLang="en-US" smtClean="0"/>
-              <a:t>2026-07-08</a:t>
+              <a:t>2026-07-13</a:t>
             </a:fld>
             <a:endParaRPr lang="ko-KR" altLang="en-US"/>
           </a:p>
@@ -13417,7 +13417,7 @@
         </p:spPr>
         <p:txBody>
           <a:bodyPr>
-            <a:normAutofit/>
+            <a:normAutofit lnSpcReduction="10000"/>
           </a:bodyPr>
           <a:lstStyle/>
           <a:p>
@@ -13553,7 +13553,30 @@
             </a:r>
             <a:r>
               <a:rPr lang="ko-KR" altLang="en-US" dirty="0"/>
-              <a:t>지금까지 명령어 기록</a:t>
+              <a:t>지금까지 명령어 </a:t>
+            </a:r>
+            <a:r>
+              <a:rPr lang="ko-KR" altLang="en-US" dirty="0" smtClean="0"/>
+              <a:t>기록</a:t>
+            </a:r>
+            <a:endParaRPr lang="en-US" altLang="ko-KR" dirty="0" smtClean="0"/>
+          </a:p>
+          <a:p>
+            <a:pPr lvl="1"/>
+            <a:r>
+              <a:rPr lang="en-US" altLang="ko-KR" dirty="0"/>
+              <a:t> </a:t>
+            </a:r>
+            <a:r>
+              <a:rPr lang="en-US" altLang="ko-KR" dirty="0" smtClean="0"/>
+              <a:t>cat, more, less</a:t>
+            </a:r>
+          </a:p>
+          <a:p>
+            <a:pPr lvl="1"/>
+            <a:r>
+              <a:rPr lang="en-US" altLang="ko-KR" dirty="0" smtClean="0"/>
+              <a:t>find </a:t>
             </a:r>
             <a:endParaRPr lang="en-US" altLang="ko-KR" dirty="0"/>
           </a:p>
@@ -13561,7 +13584,15 @@
             <a:pPr lvl="1"/>
             <a:r>
               <a:rPr lang="en-US" altLang="ko-KR" dirty="0"/>
-              <a:t>Jobs	# </a:t>
+              <a:t>j</a:t>
+            </a:r>
+            <a:r>
+              <a:rPr lang="en-US" altLang="ko-KR" dirty="0" smtClean="0"/>
+              <a:t>obs</a:t>
+            </a:r>
+            <a:r>
+              <a:rPr lang="en-US" altLang="ko-KR" dirty="0"/>
+              <a:t>	# </a:t>
             </a:r>
             <a:r>
               <a:rPr lang="ko-KR" altLang="en-US" dirty="0"/>
@@ -13905,8 +13936,29 @@
             <a:pPr lvl="1"/>
             <a:r>
               <a:rPr lang="en-US" altLang="ko-KR" dirty="0"/>
-              <a:t>$HOME/</a:t>
-            </a:r>
+              <a:t>$HOME</a:t>
+            </a:r>
+            <a:r>
+              <a:rPr lang="en-US" altLang="ko-KR" dirty="0" smtClean="0"/>
+              <a:t>/				cf. </a:t>
+            </a:r>
+            <a:r>
+              <a:rPr lang="en-US" altLang="ko-KR" dirty="0" smtClean="0"/>
+              <a:t>echo $HOME </a:t>
+            </a:r>
+            <a:r>
+              <a:rPr lang="en-US" altLang="ko-KR" dirty="0" smtClean="0">
+                <a:sym typeface="Wingdings" panose="05000000000000000000" pitchFamily="2" charset="2"/>
+              </a:rPr>
+              <a:t> $home/</a:t>
+            </a:r>
+            <a:r>
+              <a:rPr lang="en-US" altLang="ko-KR" dirty="0" err="1" smtClean="0">
+                <a:sym typeface="Wingdings" panose="05000000000000000000" pitchFamily="2" charset="2"/>
+              </a:rPr>
+              <a:t>userid</a:t>
+            </a:r>
+            <a:endParaRPr lang="en-US" altLang="ko-KR" dirty="0"/>
           </a:p>
           <a:p>
             <a:pPr lvl="2"/>
@@ -14096,13 +14148,13 @@
         </p:nvSpPr>
         <p:spPr>
           <a:xfrm>
-            <a:off x="385192" y="1124744"/>
+            <a:off x="356667" y="836712"/>
             <a:ext cx="8435280" cy="5544616"/>
           </a:xfrm>
         </p:spPr>
         <p:txBody>
           <a:bodyPr>
-            <a:normAutofit/>
+            <a:normAutofit lnSpcReduction="10000"/>
           </a:bodyPr>
           <a:lstStyle/>
           <a:p>
@@ -14144,10 +14196,94 @@
           <a:p>
             <a:pPr lvl="2"/>
             <a:r>
+              <a:rPr lang="en-US" altLang="ko-KR" dirty="0" smtClean="0">
+                <a:sym typeface="Wingdings" panose="05000000000000000000" pitchFamily="2" charset="2"/>
+              </a:rPr>
+              <a:t> </a:t>
+            </a:r>
+            <a:r>
               <a:rPr lang="en-US" altLang="ko-KR" dirty="0">
                 <a:sym typeface="Wingdings" panose="05000000000000000000" pitchFamily="2" charset="2"/>
               </a:rPr>
-              <a:t>which pip</a:t>
+              <a:t>(conda542</a:t>
+            </a:r>
+            <a:r>
+              <a:rPr lang="en-US" altLang="ko-KR" dirty="0" smtClean="0">
+                <a:sym typeface="Wingdings" panose="05000000000000000000" pitchFamily="2" charset="2"/>
+              </a:rPr>
+              <a:t>)   </a:t>
+            </a:r>
+            <a:r>
+              <a:rPr lang="en-US" altLang="ko-KR" dirty="0" err="1" smtClean="0">
+                <a:sym typeface="Wingdings" panose="05000000000000000000" pitchFamily="2" charset="2"/>
+              </a:rPr>
+              <a:t>gcc</a:t>
+            </a:r>
+            <a:r>
+              <a:rPr lang="en-US" altLang="ko-KR" dirty="0" smtClean="0">
+                <a:sym typeface="Wingdings" panose="05000000000000000000" pitchFamily="2" charset="2"/>
+              </a:rPr>
+              <a:t>, </a:t>
+            </a:r>
+            <a:r>
+              <a:rPr lang="en-US" altLang="ko-KR" dirty="0" err="1" smtClean="0">
+                <a:sym typeface="Wingdings" panose="05000000000000000000" pitchFamily="2" charset="2"/>
+              </a:rPr>
+              <a:t>gfortran</a:t>
+            </a:r>
+            <a:r>
+              <a:rPr lang="en-US" altLang="ko-KR" dirty="0" smtClean="0">
+                <a:sym typeface="Wingdings" panose="05000000000000000000" pitchFamily="2" charset="2"/>
+              </a:rPr>
+              <a:t> </a:t>
+            </a:r>
+            <a:r>
+              <a:rPr lang="ko-KR" altLang="en-US" dirty="0" smtClean="0">
+                <a:sym typeface="Wingdings" panose="05000000000000000000" pitchFamily="2" charset="2"/>
+              </a:rPr>
+              <a:t>을 쓸 수 있는 환경 변수</a:t>
+            </a:r>
+            <a:endParaRPr lang="en-US" altLang="ko-KR" dirty="0">
+              <a:sym typeface="Wingdings" panose="05000000000000000000" pitchFamily="2" charset="2"/>
+            </a:endParaRPr>
+          </a:p>
+          <a:p>
+            <a:pPr lvl="3"/>
+            <a:r>
+              <a:rPr lang="en-US" altLang="ko-KR" dirty="0" err="1" smtClean="0">
+                <a:sym typeface="Wingdings" panose="05000000000000000000" pitchFamily="2" charset="2"/>
+              </a:rPr>
+              <a:t>Conda</a:t>
+            </a:r>
+            <a:r>
+              <a:rPr lang="en-US" altLang="ko-KR" dirty="0" smtClean="0">
+                <a:sym typeface="Wingdings" panose="05000000000000000000" pitchFamily="2" charset="2"/>
+              </a:rPr>
+              <a:t> info –</a:t>
+            </a:r>
+            <a:r>
+              <a:rPr lang="en-US" altLang="ko-KR" dirty="0" err="1" smtClean="0">
+                <a:sym typeface="Wingdings" panose="05000000000000000000" pitchFamily="2" charset="2"/>
+              </a:rPr>
+              <a:t>envs</a:t>
+            </a:r>
+            <a:endParaRPr lang="en-US" altLang="ko-KR" dirty="0" smtClean="0">
+              <a:sym typeface="Wingdings" panose="05000000000000000000" pitchFamily="2" charset="2"/>
+            </a:endParaRPr>
+          </a:p>
+          <a:p>
+            <a:pPr lvl="2"/>
+            <a:r>
+              <a:rPr lang="en-US" altLang="ko-KR" dirty="0" smtClean="0">
+                <a:sym typeface="Wingdings" panose="05000000000000000000" pitchFamily="2" charset="2"/>
+              </a:rPr>
+              <a:t>Which </a:t>
+            </a:r>
+            <a:r>
+              <a:rPr lang="en-US" altLang="ko-KR" dirty="0">
+                <a:sym typeface="Wingdings" panose="05000000000000000000" pitchFamily="2" charset="2"/>
+              </a:rPr>
+              <a:t>pip</a:t>
             </a:r>
           </a:p>
           <a:p>
@@ -14178,16 +14314,22 @@
               <a:t> pip install </a:t>
             </a:r>
             <a:r>
-              <a:rPr lang="en-US" altLang="ko-KR" dirty="0" err="1">
+              <a:rPr lang="en-US" altLang="ko-KR" dirty="0" err="1" smtClean="0">
                 <a:sym typeface="Wingdings" panose="05000000000000000000" pitchFamily="2" charset="2"/>
               </a:rPr>
-              <a:t>wannerberri</a:t>
+              <a:t>wannierberri</a:t>
+            </a:r>
+            <a:r>
+              <a:rPr lang="en-US" altLang="ko-KR" dirty="0" smtClean="0">
+                <a:sym typeface="Wingdings" panose="05000000000000000000" pitchFamily="2" charset="2"/>
+              </a:rPr>
+              <a:t> </a:t>
             </a:r>
             <a:r>
               <a:rPr lang="en-US" altLang="ko-KR" dirty="0">
                 <a:sym typeface="Wingdings" panose="05000000000000000000" pitchFamily="2" charset="2"/>
               </a:rPr>
-              <a:t>  can’t write $HOME/.local/lib (permission error)</a:t>
+              <a:t> can’t write $HOME/.local/lib (permission error)</a:t>
             </a:r>
           </a:p>
           <a:p>
@@ -14681,9 +14823,23 @@
               <a:buAutoNum type="alphaLcPeriod" startAt="4"/>
             </a:pPr>
             <a:r>
-              <a:rPr lang="en-US" altLang="ko-KR" dirty="0"/>
-              <a:t>atom</a:t>
-            </a:r>
+              <a:rPr lang="en-US" altLang="ko-KR" dirty="0" smtClean="0"/>
+              <a:t>Atom</a:t>
+            </a:r>
+          </a:p>
+          <a:p>
+            <a:pPr>
+              <a:buFont typeface="+mj-lt"/>
+              <a:buAutoNum type="alphaLcPeriod" startAt="4"/>
+            </a:pPr>
+            <a:endParaRPr lang="en-US" altLang="ko-KR" dirty="0"/>
+          </a:p>
+          <a:p>
+            <a:pPr>
+              <a:buFont typeface="+mj-lt"/>
+              <a:buAutoNum type="alphaLcPeriod" startAt="4"/>
+            </a:pPr>
+            <a:endParaRPr lang="en-US" altLang="ko-KR" dirty="0" smtClean="0"/>
           </a:p>
           <a:p>
             <a:pPr lvl="1">
@@ -14695,6 +14851,292 @@
           <a:p>
             <a:pPr lvl="1"/>
             <a:endParaRPr lang="ko-KR" altLang="en-US" dirty="0"/>
+          </a:p>
+        </p:txBody>
+      </p:sp>
+      <p:sp>
+        <p:nvSpPr>
+          <p:cNvPr id="4" name="TextBox 3"/>
+          <p:cNvSpPr txBox="1"/>
+          <p:nvPr/>
+        </p:nvSpPr>
+        <p:spPr>
+          <a:xfrm>
+            <a:off x="755576" y="1484784"/>
+            <a:ext cx="7488832" cy="5078313"/>
+          </a:xfrm>
+          <a:prstGeom prst="rect">
+            <a:avLst/>
+          </a:prstGeom>
+          <a:noFill/>
+        </p:spPr>
+        <p:txBody>
+          <a:bodyPr wrap="square" rtlCol="0">
+            <a:spAutoFit/>
+          </a:bodyPr>
+          <a:lstStyle/>
+          <a:p>
+            <a:r>
+              <a:rPr lang="en-US" altLang="ko-KR" sz="1200" dirty="0"/>
+              <a:t>#!/</a:t>
+            </a:r>
+            <a:r>
+              <a:rPr lang="en-US" altLang="ko-KR" sz="1200" dirty="0" err="1"/>
+              <a:t>usr</a:t>
+            </a:r>
+            <a:r>
+              <a:rPr lang="en-US" altLang="ko-KR" sz="1200" dirty="0"/>
+              <a:t>/bin/bash</a:t>
+            </a:r>
+          </a:p>
+          <a:p>
+            <a:r>
+              <a:rPr lang="en-US" altLang="ko-KR" sz="1200" dirty="0" smtClean="0"/>
+              <a:t>echo </a:t>
+            </a:r>
+            <a:r>
+              <a:rPr lang="en-US" altLang="ko-KR" sz="1200" dirty="0"/>
+              <a:t>"1. Install xml"</a:t>
+            </a:r>
+          </a:p>
+          <a:p>
+            <a:r>
+              <a:rPr lang="en-US" altLang="ko-KR" sz="1200" dirty="0" err="1"/>
+              <a:t>wget</a:t>
+            </a:r>
+            <a:r>
+              <a:rPr lang="en-US" altLang="ko-KR" sz="1200" dirty="0"/>
+              <a:t> https://launchpad.net/xmlf90/trunk/1.5/+download/xmlf90-1.5.4.tar.gz</a:t>
+            </a:r>
+          </a:p>
+          <a:p>
+            <a:r>
+              <a:rPr lang="en-US" altLang="ko-KR" sz="1200" dirty="0"/>
+              <a:t>tar </a:t>
+            </a:r>
+            <a:r>
+              <a:rPr lang="en-US" altLang="ko-KR" sz="1200" dirty="0" err="1"/>
+              <a:t>xvzf</a:t>
+            </a:r>
+            <a:r>
+              <a:rPr lang="en-US" altLang="ko-KR" sz="1200" dirty="0"/>
+              <a:t> xmlf90-1.5.4.tar.gz</a:t>
+            </a:r>
+          </a:p>
+          <a:p>
+            <a:r>
+              <a:rPr lang="en-US" altLang="ko-KR" sz="1200" dirty="0" err="1"/>
+              <a:t>mkdir</a:t>
+            </a:r>
+            <a:r>
+              <a:rPr lang="en-US" altLang="ko-KR" sz="1200" dirty="0"/>
+              <a:t> libs</a:t>
+            </a:r>
+          </a:p>
+          <a:p>
+            <a:r>
+              <a:rPr lang="en-US" altLang="ko-KR" sz="1200" dirty="0"/>
+              <a:t>cd xmlf90-1.5.4</a:t>
+            </a:r>
+          </a:p>
+          <a:p>
+            <a:r>
+              <a:rPr lang="en-US" altLang="ko-KR" sz="1200" dirty="0"/>
+              <a:t>./configure --prefix=$HOME/atom/libs</a:t>
+            </a:r>
+          </a:p>
+          <a:p>
+            <a:r>
+              <a:rPr lang="en-US" altLang="ko-KR" sz="1200" dirty="0"/>
+              <a:t>make -j4</a:t>
+            </a:r>
+          </a:p>
+          <a:p>
+            <a:r>
+              <a:rPr lang="en-US" altLang="ko-KR" sz="1200" dirty="0"/>
+              <a:t>make install</a:t>
+            </a:r>
+          </a:p>
+          <a:p>
+            <a:r>
+              <a:rPr lang="en-US" altLang="ko-KR" sz="1200" dirty="0"/>
+              <a:t>cd ..</a:t>
+            </a:r>
+          </a:p>
+          <a:p>
+            <a:r>
+              <a:rPr lang="en-US" altLang="ko-KR" sz="1200" dirty="0"/>
+              <a:t>echo "2. Install </a:t>
+            </a:r>
+            <a:r>
+              <a:rPr lang="en-US" altLang="ko-KR" sz="1200" dirty="0" err="1"/>
+              <a:t>libgrid</a:t>
+            </a:r>
+            <a:r>
+              <a:rPr lang="en-US" altLang="ko-KR" sz="1200" dirty="0"/>
+              <a:t>"</a:t>
+            </a:r>
+          </a:p>
+          <a:p>
+            <a:r>
+              <a:rPr lang="en-US" altLang="ko-KR" sz="1200" dirty="0" err="1"/>
+              <a:t>wget</a:t>
+            </a:r>
+            <a:r>
+              <a:rPr lang="en-US" altLang="ko-KR" sz="1200" dirty="0"/>
+              <a:t> https://launchpad.net/libgridxc/trunk/0.7/+download/libgridxc-0.7.6.tgz</a:t>
+            </a:r>
+          </a:p>
+          <a:p>
+            <a:r>
+              <a:rPr lang="en-US" altLang="ko-KR" sz="1200" dirty="0"/>
+              <a:t>tar </a:t>
+            </a:r>
+            <a:r>
+              <a:rPr lang="en-US" altLang="ko-KR" sz="1200" dirty="0" err="1"/>
+              <a:t>xvzf</a:t>
+            </a:r>
+            <a:r>
+              <a:rPr lang="en-US" altLang="ko-KR" sz="1200" dirty="0"/>
+              <a:t> libgridxc-0.7.6.tgz</a:t>
+            </a:r>
+          </a:p>
+          <a:p>
+            <a:r>
+              <a:rPr lang="en-US" altLang="ko-KR" sz="1200" dirty="0"/>
+              <a:t>cd libgridxc-0.7.6</a:t>
+            </a:r>
+          </a:p>
+          <a:p>
+            <a:r>
+              <a:rPr lang="en-US" altLang="ko-KR" sz="1200" dirty="0" err="1"/>
+              <a:t>mkdir</a:t>
+            </a:r>
+            <a:r>
+              <a:rPr lang="en-US" altLang="ko-KR" sz="1200" dirty="0"/>
+              <a:t> </a:t>
+            </a:r>
+            <a:r>
+              <a:rPr lang="en-US" altLang="ko-KR" sz="1200" dirty="0" err="1"/>
+              <a:t>Gfortran</a:t>
+            </a:r>
+            <a:endParaRPr lang="en-US" altLang="ko-KR" sz="1200" dirty="0"/>
+          </a:p>
+          <a:p>
+            <a:r>
+              <a:rPr lang="en-US" altLang="ko-KR" sz="1200" dirty="0" err="1"/>
+              <a:t>cp</a:t>
+            </a:r>
+            <a:r>
+              <a:rPr lang="en-US" altLang="ko-KR" sz="1200" dirty="0"/>
+              <a:t> extra/fortran.mk </a:t>
+            </a:r>
+            <a:r>
+              <a:rPr lang="en-US" altLang="ko-KR" sz="1200" dirty="0" err="1"/>
+              <a:t>Gfortran</a:t>
+            </a:r>
+            <a:endParaRPr lang="en-US" altLang="ko-KR" sz="1200" dirty="0"/>
+          </a:p>
+          <a:p>
+            <a:r>
+              <a:rPr lang="en-US" altLang="ko-KR" sz="1200" dirty="0"/>
+              <a:t>cd </a:t>
+            </a:r>
+            <a:r>
+              <a:rPr lang="en-US" altLang="ko-KR" sz="1200" dirty="0" err="1"/>
+              <a:t>Gfortran</a:t>
+            </a:r>
+            <a:endParaRPr lang="en-US" altLang="ko-KR" sz="1200" dirty="0"/>
+          </a:p>
+          <a:p>
+            <a:r>
+              <a:rPr lang="en-US" altLang="ko-KR" sz="1200" dirty="0" err="1"/>
+              <a:t>sh</a:t>
+            </a:r>
+            <a:r>
+              <a:rPr lang="en-US" altLang="ko-KR" sz="1200" dirty="0"/>
+              <a:t> ../src/config.sh         # this makes </a:t>
+            </a:r>
+            <a:r>
+              <a:rPr lang="en-US" altLang="ko-KR" sz="1200" dirty="0" err="1"/>
+              <a:t>makefile</a:t>
+            </a:r>
+            <a:endParaRPr lang="en-US" altLang="ko-KR" sz="1200" dirty="0"/>
+          </a:p>
+          <a:p>
+            <a:r>
+              <a:rPr lang="en-US" altLang="ko-KR" sz="1200" dirty="0"/>
+              <a:t>make</a:t>
+            </a:r>
+          </a:p>
+          <a:p>
+            <a:r>
+              <a:rPr lang="en-US" altLang="ko-KR" sz="1200" dirty="0"/>
+              <a:t>cd ../..</a:t>
+            </a:r>
+          </a:p>
+          <a:p>
+            <a:r>
+              <a:rPr lang="en-US" altLang="ko-KR" sz="1200" dirty="0"/>
+              <a:t>echo "3. atom install"</a:t>
+            </a:r>
+          </a:p>
+          <a:p>
+            <a:r>
+              <a:rPr lang="en-US" altLang="ko-KR" sz="1200" dirty="0" err="1"/>
+              <a:t>wget</a:t>
+            </a:r>
+            <a:r>
+              <a:rPr lang="en-US" altLang="ko-KR" sz="1200" dirty="0"/>
+              <a:t> https://siesta-project.org/SIESTA_MATERIAL/Pseudos/Code/atom-4.2.7-100.tgz</a:t>
+            </a:r>
+          </a:p>
+          <a:p>
+            <a:r>
+              <a:rPr lang="en-US" altLang="ko-KR" sz="1200" dirty="0"/>
+              <a:t>tar </a:t>
+            </a:r>
+            <a:r>
+              <a:rPr lang="en-US" altLang="ko-KR" sz="1200" dirty="0" err="1"/>
+              <a:t>xvzf</a:t>
+            </a:r>
+            <a:r>
+              <a:rPr lang="en-US" altLang="ko-KR" sz="1200" dirty="0"/>
+              <a:t> atom-4.2.7-100.tgz</a:t>
+            </a:r>
+          </a:p>
+          <a:p>
+            <a:r>
+              <a:rPr lang="en-US" altLang="ko-KR" sz="1200" dirty="0"/>
+              <a:t>cd atom-4.2.7-100</a:t>
+            </a:r>
+          </a:p>
+          <a:p>
+            <a:r>
+              <a:rPr lang="en-US" altLang="ko-KR" sz="1200" dirty="0" err="1"/>
+              <a:t>cp</a:t>
+            </a:r>
+            <a:r>
+              <a:rPr lang="en-US" altLang="ko-KR" sz="1200" dirty="0"/>
+              <a:t> ../patch/</a:t>
+            </a:r>
+            <a:r>
+              <a:rPr lang="en-US" altLang="ko-KR" sz="1200" dirty="0" err="1"/>
+              <a:t>arch.make</a:t>
+            </a:r>
+            <a:r>
+              <a:rPr lang="en-US" altLang="ko-KR" sz="1200" dirty="0"/>
+              <a:t> .</a:t>
+            </a:r>
+          </a:p>
+          <a:p>
+            <a:r>
+              <a:rPr lang="en-US" altLang="ko-KR" sz="1200" dirty="0"/>
+              <a:t>make</a:t>
+            </a:r>
+          </a:p>
+          <a:p>
+            <a:endParaRPr lang="ko-KR" altLang="en-US" sz="1200" dirty="0"/>
           </a:p>
         </p:txBody>
       </p:sp>
@@ -15055,9 +15497,51 @@
               <a:rPr lang="en-US" altLang="ko-KR" dirty="0">
                 <a:hlinkClick r:id="rId2"/>
               </a:rPr>
-              <a:t>https://nanornd.edison.re.kr/home</a:t>
-            </a:r>
-            <a:endParaRPr lang="en-US" altLang="ko-KR" dirty="0"/>
+              <a:t>https://</a:t>
+            </a:r>
+            <a:r>
+              <a:rPr lang="en-US" altLang="ko-KR" dirty="0" smtClean="0">
+                <a:hlinkClick r:id="rId2"/>
+              </a:rPr>
+              <a:t>nanornd.edison.re.kr/home</a:t>
+            </a:r>
+            <a:endParaRPr lang="en-US" altLang="ko-KR" dirty="0" smtClean="0"/>
+          </a:p>
+          <a:p>
+            <a:pPr lvl="1"/>
+            <a:r>
+              <a:rPr lang="en-US" altLang="ko-KR" dirty="0"/>
+              <a:t> </a:t>
+            </a:r>
+            <a:r>
+              <a:rPr lang="ko-KR" altLang="en-US" dirty="0" smtClean="0">
+                <a:solidFill>
+                  <a:srgbClr val="FF0000"/>
+                </a:solidFill>
+              </a:rPr>
+              <a:t>계정 만든 후 </a:t>
+            </a:r>
+            <a:r>
+              <a:rPr lang="en-US" altLang="ko-KR" dirty="0" smtClean="0">
+                <a:solidFill>
+                  <a:srgbClr val="FF0000"/>
+                </a:solidFill>
+              </a:rPr>
+              <a:t>5</a:t>
+            </a:r>
+            <a:r>
+              <a:rPr lang="ko-KR" altLang="en-US" dirty="0" smtClean="0">
+                <a:solidFill>
+                  <a:srgbClr val="FF0000"/>
+                </a:solidFill>
+              </a:rPr>
+              <a:t>분간 대기</a:t>
+            </a:r>
+            <a:endParaRPr lang="en-US" altLang="ko-KR" dirty="0">
+              <a:solidFill>
+                <a:srgbClr val="FF0000"/>
+              </a:solidFill>
+            </a:endParaRPr>
           </a:p>
           <a:p>
             <a:pPr lvl="1"/>
@@ -16001,8 +16485,28 @@
               <a:t>Job submit </a:t>
             </a:r>
             <a:r>
-              <a:rPr lang="ko-KR" altLang="en-US" dirty="0"/>
-              <a:t>가능</a:t>
+              <a:rPr lang="ko-KR" altLang="en-US" dirty="0" smtClean="0"/>
+              <a:t>가능 </a:t>
+            </a:r>
+            <a:r>
+              <a:rPr lang="en-US" altLang="ko-KR" dirty="0" smtClean="0"/>
+              <a:t>( </a:t>
+            </a:r>
+            <a:r>
+              <a:rPr lang="en-US" altLang="ko-KR" dirty="0" err="1" smtClean="0"/>
+              <a:t>sbatch</a:t>
+            </a:r>
+            <a:r>
+              <a:rPr lang="en-US" altLang="ko-KR" dirty="0" smtClean="0"/>
+              <a:t>, </a:t>
+            </a:r>
+            <a:r>
+              <a:rPr lang="en-US" altLang="ko-KR" dirty="0" err="1" smtClean="0"/>
+              <a:t>qsub</a:t>
+            </a:r>
+            <a:r>
+              <a:rPr lang="en-US" altLang="ko-KR" dirty="0" smtClean="0"/>
+              <a:t>)</a:t>
             </a:r>
             <a:endParaRPr lang="en-US" altLang="ko-KR" dirty="0"/>
           </a:p>
@@ -17211,6 +17715,74 @@
                 <a:srgbClr val="00B050"/>
               </a:solidFill>
             </a:endParaRPr>
+          </a:p>
+        </p:txBody>
+      </p:sp>
+      <p:sp>
+        <p:nvSpPr>
+          <p:cNvPr id="5" name="TextBox 4"/>
+          <p:cNvSpPr txBox="1"/>
+          <p:nvPr/>
+        </p:nvSpPr>
+        <p:spPr>
+          <a:xfrm>
+            <a:off x="5868144" y="4869160"/>
+            <a:ext cx="3096344" cy="1200329"/>
+          </a:xfrm>
+          <a:prstGeom prst="rect">
+            <a:avLst/>
+          </a:prstGeom>
+          <a:noFill/>
+        </p:spPr>
+        <p:txBody>
+          <a:bodyPr wrap="square" rtlCol="0">
+            <a:spAutoFit/>
+          </a:bodyPr>
+          <a:lstStyle/>
+          <a:p>
+            <a:r>
+              <a:rPr lang="en-US" altLang="ko-KR" dirty="0" err="1" smtClean="0"/>
+              <a:t>Ncore</a:t>
+            </a:r>
+            <a:r>
+              <a:rPr lang="en-US" altLang="ko-KR" dirty="0" smtClean="0"/>
+              <a:t> = 500</a:t>
+            </a:r>
+          </a:p>
+          <a:p>
+            <a:r>
+              <a:rPr lang="en-US" altLang="ko-KR" dirty="0" smtClean="0"/>
+              <a:t>     system = 50</a:t>
+            </a:r>
+          </a:p>
+          <a:p>
+            <a:r>
+              <a:rPr lang="en-US" altLang="ko-KR" dirty="0"/>
+              <a:t> </a:t>
+            </a:r>
+            <a:r>
+              <a:rPr lang="en-US" altLang="ko-KR" dirty="0" smtClean="0"/>
+              <a:t>     master = 4/person</a:t>
+            </a:r>
+          </a:p>
+          <a:p>
+            <a:r>
+              <a:rPr lang="en-US" altLang="ko-KR" dirty="0"/>
+              <a:t> </a:t>
+            </a:r>
+            <a:r>
+              <a:rPr lang="en-US" altLang="ko-KR" dirty="0" smtClean="0"/>
+              <a:t>     </a:t>
+            </a:r>
+            <a:r>
+              <a:rPr lang="ko-KR" altLang="en-US" dirty="0" smtClean="0"/>
+              <a:t>나머지 </a:t>
+            </a:r>
+            <a:r>
+              <a:rPr lang="en-US" altLang="ko-KR" dirty="0" smtClean="0"/>
+              <a:t>= queue</a:t>
+            </a:r>
+            <a:endParaRPr lang="ko-KR" altLang="en-US" dirty="0"/>
           </a:p>
         </p:txBody>
       </p:sp>
